--- a/docs/pptx/whole/ritu-linsubhr-sens-throm3.pptx
+++ b/docs/pptx/whole/ritu-linsubhr-sens-throm3.pptx
@@ -2443,7 +2443,7 @@
           </p:nvSpPr>
           <p:spPr>
             <a:xfrm>
-              <a:off x="2520195" y="2073503"/>
+              <a:off x="2520043" y="2073503"/>
               <a:ext cx="0" cy="3649639"/>
             </a:xfrm>
             <a:custGeom>
@@ -2486,7 +2486,7 @@
           </p:nvSpPr>
           <p:spPr>
             <a:xfrm>
-              <a:off x="4326850" y="2073503"/>
+              <a:off x="4325074" y="2073503"/>
               <a:ext cx="0" cy="3649639"/>
             </a:xfrm>
             <a:custGeom>
@@ -2529,7 +2529,7 @@
           </p:nvSpPr>
           <p:spPr>
             <a:xfrm>
-              <a:off x="6133505" y="2073503"/>
+              <a:off x="6130105" y="2073503"/>
               <a:ext cx="0" cy="3649639"/>
             </a:xfrm>
             <a:custGeom>
@@ -2572,7 +2572,7 @@
           </p:nvSpPr>
           <p:spPr>
             <a:xfrm>
-              <a:off x="7940161" y="2073503"/>
+              <a:off x="7935136" y="2073503"/>
               <a:ext cx="0" cy="3649639"/>
             </a:xfrm>
             <a:custGeom>
@@ -2830,7 +2830,7 @@
           </p:nvSpPr>
           <p:spPr>
             <a:xfrm>
-              <a:off x="1616868" y="2073503"/>
+              <a:off x="1617528" y="2073503"/>
               <a:ext cx="0" cy="3649639"/>
             </a:xfrm>
             <a:custGeom>
@@ -2873,7 +2873,7 @@
           </p:nvSpPr>
           <p:spPr>
             <a:xfrm>
-              <a:off x="3423523" y="2073503"/>
+              <a:off x="3422559" y="2073503"/>
               <a:ext cx="0" cy="3649639"/>
             </a:xfrm>
             <a:custGeom>
@@ -2916,7 +2916,7 @@
           </p:nvSpPr>
           <p:spPr>
             <a:xfrm>
-              <a:off x="5230178" y="2073503"/>
+              <a:off x="5227590" y="2073503"/>
               <a:ext cx="0" cy="3649639"/>
             </a:xfrm>
             <a:custGeom>
@@ -2959,7 +2959,7 @@
           </p:nvSpPr>
           <p:spPr>
             <a:xfrm>
-              <a:off x="7036833" y="2073503"/>
+              <a:off x="7032620" y="2073503"/>
               <a:ext cx="0" cy="3649639"/>
             </a:xfrm>
             <a:custGeom>
@@ -3003,464 +3003,458 @@
           <p:spPr>
             <a:xfrm>
               <a:off x="1172049" y="2073503"/>
-              <a:ext cx="7090630" cy="3467503"/>
+              <a:ext cx="7090630" cy="3470352"/>
             </a:xfrm>
             <a:custGeom>
               <a:avLst/>
               <a:pathLst>
-                <a:path w="7090630" h="3467503">
+                <a:path w="7090630" h="3470352">
                   <a:moveTo>
-                    <a:pt x="1769792" y="0"/>
+                    <a:pt x="1842101" y="0"/>
                   </a:moveTo>
                   <a:lnTo>
-                    <a:pt x="1790563" y="74089"/>
-                  </a:lnTo>
-                  <a:lnTo>
-                    <a:pt x="1862185" y="311754"/>
-                  </a:lnTo>
-                  <a:lnTo>
-                    <a:pt x="1933808" y="532854"/>
-                  </a:lnTo>
-                  <a:lnTo>
-                    <a:pt x="2005430" y="738542"/>
-                  </a:lnTo>
-                  <a:lnTo>
-                    <a:pt x="2077053" y="929892"/>
-                  </a:lnTo>
-                  <a:lnTo>
-                    <a:pt x="2148675" y="1107905"/>
-                  </a:lnTo>
-                  <a:lnTo>
-                    <a:pt x="2220298" y="1273510"/>
-                  </a:lnTo>
-                  <a:lnTo>
-                    <a:pt x="2291920" y="1427572"/>
-                  </a:lnTo>
-                  <a:lnTo>
-                    <a:pt x="2363543" y="1570895"/>
-                  </a:lnTo>
-                  <a:lnTo>
-                    <a:pt x="2435165" y="1704227"/>
-                  </a:lnTo>
-                  <a:lnTo>
-                    <a:pt x="2506788" y="1828266"/>
-                  </a:lnTo>
-                  <a:lnTo>
-                    <a:pt x="2578410" y="1943659"/>
-                  </a:lnTo>
-                  <a:lnTo>
-                    <a:pt x="2650033" y="2051009"/>
-                  </a:lnTo>
-                  <a:lnTo>
-                    <a:pt x="2721655" y="2150876"/>
-                  </a:lnTo>
-                  <a:lnTo>
-                    <a:pt x="2793278" y="2243782"/>
-                  </a:lnTo>
-                  <a:lnTo>
-                    <a:pt x="2864901" y="2330212"/>
-                  </a:lnTo>
-                  <a:lnTo>
-                    <a:pt x="2936523" y="2410618"/>
-                  </a:lnTo>
-                  <a:lnTo>
-                    <a:pt x="3008146" y="2485419"/>
-                  </a:lnTo>
-                  <a:lnTo>
-                    <a:pt x="3079768" y="2555006"/>
-                  </a:lnTo>
-                  <a:lnTo>
-                    <a:pt x="3151391" y="2619742"/>
-                  </a:lnTo>
-                  <a:lnTo>
-                    <a:pt x="3223013" y="2635346"/>
-                  </a:lnTo>
-                  <a:lnTo>
-                    <a:pt x="3294636" y="2590195"/>
-                  </a:lnTo>
-                  <a:lnTo>
-                    <a:pt x="3366258" y="2542640"/>
-                  </a:lnTo>
-                  <a:lnTo>
-                    <a:pt x="3437881" y="2492554"/>
-                  </a:lnTo>
-                  <a:lnTo>
-                    <a:pt x="3509503" y="2439803"/>
-                  </a:lnTo>
-                  <a:lnTo>
-                    <a:pt x="3581126" y="2384244"/>
-                  </a:lnTo>
-                  <a:lnTo>
-                    <a:pt x="3652748" y="2325728"/>
-                  </a:lnTo>
-                  <a:lnTo>
-                    <a:pt x="3724371" y="2264099"/>
-                  </a:lnTo>
-                  <a:lnTo>
-                    <a:pt x="3795993" y="2199189"/>
-                  </a:lnTo>
-                  <a:lnTo>
-                    <a:pt x="3867616" y="2130825"/>
-                  </a:lnTo>
-                  <a:lnTo>
-                    <a:pt x="3939238" y="2058822"/>
-                  </a:lnTo>
-                  <a:lnTo>
-                    <a:pt x="4010861" y="1982987"/>
-                  </a:lnTo>
-                  <a:lnTo>
-                    <a:pt x="4082483" y="1903117"/>
-                  </a:lnTo>
-                  <a:lnTo>
-                    <a:pt x="4154106" y="1818996"/>
-                  </a:lnTo>
-                  <a:lnTo>
-                    <a:pt x="4225729" y="1730398"/>
-                  </a:lnTo>
-                  <a:lnTo>
-                    <a:pt x="4297351" y="1637084"/>
-                  </a:lnTo>
-                  <a:lnTo>
-                    <a:pt x="4368974" y="1538805"/>
-                  </a:lnTo>
-                  <a:lnTo>
-                    <a:pt x="4440596" y="1435295"/>
-                  </a:lnTo>
-                  <a:lnTo>
-                    <a:pt x="4512219" y="1326276"/>
-                  </a:lnTo>
-                  <a:lnTo>
-                    <a:pt x="4583841" y="1211456"/>
-                  </a:lnTo>
-                  <a:lnTo>
-                    <a:pt x="4655464" y="1090524"/>
-                  </a:lnTo>
-                  <a:lnTo>
-                    <a:pt x="4727086" y="963157"/>
-                  </a:lnTo>
-                  <a:lnTo>
-                    <a:pt x="4798709" y="829011"/>
-                  </a:lnTo>
-                  <a:lnTo>
-                    <a:pt x="4870331" y="687726"/>
-                  </a:lnTo>
-                  <a:lnTo>
-                    <a:pt x="4941954" y="538921"/>
-                  </a:lnTo>
-                  <a:lnTo>
-                    <a:pt x="5013576" y="382198"/>
-                  </a:lnTo>
-                  <a:lnTo>
-                    <a:pt x="5085199" y="217133"/>
-                  </a:lnTo>
-                  <a:lnTo>
-                    <a:pt x="5156821" y="43284"/>
-                  </a:lnTo>
-                  <a:lnTo>
-                    <a:pt x="5173753" y="0"/>
+                    <a:pt x="1862185" y="75343"/>
+                  </a:lnTo>
+                  <a:lnTo>
+                    <a:pt x="1933808" y="324400"/>
+                  </a:lnTo>
+                  <a:lnTo>
+                    <a:pt x="2005430" y="555257"/>
+                  </a:lnTo>
+                  <a:lnTo>
+                    <a:pt x="2077053" y="769246"/>
+                  </a:lnTo>
+                  <a:lnTo>
+                    <a:pt x="2148675" y="967598"/>
+                  </a:lnTo>
+                  <a:lnTo>
+                    <a:pt x="2220298" y="1151456"/>
+                  </a:lnTo>
+                  <a:lnTo>
+                    <a:pt x="2291920" y="1321880"/>
+                  </a:lnTo>
+                  <a:lnTo>
+                    <a:pt x="2363543" y="1479850"/>
+                  </a:lnTo>
+                  <a:lnTo>
+                    <a:pt x="2435165" y="1626278"/>
+                  </a:lnTo>
+                  <a:lnTo>
+                    <a:pt x="2506788" y="1762005"/>
+                  </a:lnTo>
+                  <a:lnTo>
+                    <a:pt x="2578410" y="1887815"/>
+                  </a:lnTo>
+                  <a:lnTo>
+                    <a:pt x="2650033" y="2004432"/>
+                  </a:lnTo>
+                  <a:lnTo>
+                    <a:pt x="2721655" y="2112528"/>
+                  </a:lnTo>
+                  <a:lnTo>
+                    <a:pt x="2793278" y="2212724"/>
+                  </a:lnTo>
+                  <a:lnTo>
+                    <a:pt x="2864901" y="2305600"/>
+                  </a:lnTo>
+                  <a:lnTo>
+                    <a:pt x="2936523" y="2391688"/>
+                  </a:lnTo>
+                  <a:lnTo>
+                    <a:pt x="3008146" y="2471487"/>
+                  </a:lnTo>
+                  <a:lnTo>
+                    <a:pt x="3079768" y="2545454"/>
+                  </a:lnTo>
+                  <a:lnTo>
+                    <a:pt x="3151391" y="2614016"/>
+                  </a:lnTo>
+                  <a:lnTo>
+                    <a:pt x="3223013" y="2637747"/>
+                  </a:lnTo>
+                  <a:lnTo>
+                    <a:pt x="3294636" y="2592056"/>
+                  </a:lnTo>
+                  <a:lnTo>
+                    <a:pt x="3366258" y="2543897"/>
+                  </a:lnTo>
+                  <a:lnTo>
+                    <a:pt x="3437881" y="2493137"/>
+                  </a:lnTo>
+                  <a:lnTo>
+                    <a:pt x="3509503" y="2439635"/>
+                  </a:lnTo>
+                  <a:lnTo>
+                    <a:pt x="3581126" y="2383244"/>
+                  </a:lnTo>
+                  <a:lnTo>
+                    <a:pt x="3652748" y="2323807"/>
+                  </a:lnTo>
+                  <a:lnTo>
+                    <a:pt x="3724371" y="2261160"/>
+                  </a:lnTo>
+                  <a:lnTo>
+                    <a:pt x="3795993" y="2195130"/>
+                  </a:lnTo>
+                  <a:lnTo>
+                    <a:pt x="3867616" y="2125533"/>
+                  </a:lnTo>
+                  <a:lnTo>
+                    <a:pt x="3939238" y="2052177"/>
+                  </a:lnTo>
+                  <a:lnTo>
+                    <a:pt x="4010861" y="1974860"/>
+                  </a:lnTo>
+                  <a:lnTo>
+                    <a:pt x="4082483" y="1893367"/>
+                  </a:lnTo>
+                  <a:lnTo>
+                    <a:pt x="4154106" y="1807472"/>
+                  </a:lnTo>
+                  <a:lnTo>
+                    <a:pt x="4225729" y="1716939"/>
+                  </a:lnTo>
+                  <a:lnTo>
+                    <a:pt x="4297351" y="1621516"/>
+                  </a:lnTo>
+                  <a:lnTo>
+                    <a:pt x="4368974" y="1520939"/>
+                  </a:lnTo>
+                  <a:lnTo>
+                    <a:pt x="4440596" y="1414930"/>
+                  </a:lnTo>
+                  <a:lnTo>
+                    <a:pt x="4512219" y="1303196"/>
+                  </a:lnTo>
+                  <a:lnTo>
+                    <a:pt x="4583841" y="1185427"/>
+                  </a:lnTo>
+                  <a:lnTo>
+                    <a:pt x="4655464" y="1061297"/>
+                  </a:lnTo>
+                  <a:lnTo>
+                    <a:pt x="4727086" y="930464"/>
+                  </a:lnTo>
+                  <a:lnTo>
+                    <a:pt x="4798709" y="792564"/>
+                  </a:lnTo>
+                  <a:lnTo>
+                    <a:pt x="4870331" y="647217"/>
+                  </a:lnTo>
+                  <a:lnTo>
+                    <a:pt x="4941954" y="494019"/>
+                  </a:lnTo>
+                  <a:lnTo>
+                    <a:pt x="5013576" y="332548"/>
+                  </a:lnTo>
+                  <a:lnTo>
+                    <a:pt x="5085199" y="162355"/>
+                  </a:lnTo>
+                  <a:lnTo>
+                    <a:pt x="5150022" y="0"/>
                   </a:lnTo>
                   <a:lnTo>
                     <a:pt x="7090630" y="0"/>
                   </a:lnTo>
                   <a:lnTo>
-                    <a:pt x="7090630" y="3467503"/>
-                  </a:lnTo>
-                  <a:lnTo>
-                    <a:pt x="7019007" y="3466285"/>
-                  </a:lnTo>
-                  <a:lnTo>
-                    <a:pt x="6947385" y="3464977"/>
-                  </a:lnTo>
-                  <a:lnTo>
-                    <a:pt x="6875762" y="3463571"/>
-                  </a:lnTo>
-                  <a:lnTo>
-                    <a:pt x="6804139" y="3462059"/>
-                  </a:lnTo>
-                  <a:lnTo>
-                    <a:pt x="6732517" y="3460434"/>
-                  </a:lnTo>
-                  <a:lnTo>
-                    <a:pt x="6660894" y="3458688"/>
-                  </a:lnTo>
-                  <a:lnTo>
-                    <a:pt x="6589272" y="3456810"/>
-                  </a:lnTo>
-                  <a:lnTo>
-                    <a:pt x="6517649" y="3454792"/>
-                  </a:lnTo>
-                  <a:lnTo>
-                    <a:pt x="6446027" y="3452622"/>
-                  </a:lnTo>
-                  <a:lnTo>
-                    <a:pt x="6374404" y="3450290"/>
-                  </a:lnTo>
-                  <a:lnTo>
-                    <a:pt x="6302782" y="3447784"/>
-                  </a:lnTo>
-                  <a:lnTo>
-                    <a:pt x="6231159" y="3445089"/>
-                  </a:lnTo>
-                  <a:lnTo>
-                    <a:pt x="6159537" y="3442193"/>
-                  </a:lnTo>
-                  <a:lnTo>
-                    <a:pt x="6087914" y="3439079"/>
-                  </a:lnTo>
-                  <a:lnTo>
-                    <a:pt x="6016292" y="3435732"/>
-                  </a:lnTo>
-                  <a:lnTo>
-                    <a:pt x="5944669" y="3432135"/>
-                  </a:lnTo>
-                  <a:lnTo>
-                    <a:pt x="5873047" y="3428268"/>
-                  </a:lnTo>
-                  <a:lnTo>
-                    <a:pt x="5801424" y="3424111"/>
-                  </a:lnTo>
-                  <a:lnTo>
-                    <a:pt x="5729802" y="3419643"/>
-                  </a:lnTo>
-                  <a:lnTo>
-                    <a:pt x="5658179" y="3414840"/>
-                  </a:lnTo>
-                  <a:lnTo>
-                    <a:pt x="5586557" y="3409677"/>
-                  </a:lnTo>
-                  <a:lnTo>
-                    <a:pt x="5514934" y="3404127"/>
-                  </a:lnTo>
-                  <a:lnTo>
-                    <a:pt x="5443311" y="3398161"/>
-                  </a:lnTo>
-                  <a:lnTo>
-                    <a:pt x="5371689" y="3391749"/>
-                  </a:lnTo>
-                  <a:lnTo>
-                    <a:pt x="5300066" y="3384856"/>
-                  </a:lnTo>
-                  <a:lnTo>
-                    <a:pt x="5228444" y="3377446"/>
-                  </a:lnTo>
-                  <a:lnTo>
-                    <a:pt x="5156821" y="3369482"/>
-                  </a:lnTo>
-                  <a:lnTo>
-                    <a:pt x="5085199" y="3360920"/>
-                  </a:lnTo>
-                  <a:lnTo>
-                    <a:pt x="5013576" y="3351717"/>
-                  </a:lnTo>
-                  <a:lnTo>
-                    <a:pt x="4941954" y="3341825"/>
-                  </a:lnTo>
-                  <a:lnTo>
-                    <a:pt x="4870331" y="3331191"/>
-                  </a:lnTo>
-                  <a:lnTo>
-                    <a:pt x="4798709" y="3319761"/>
-                  </a:lnTo>
-                  <a:lnTo>
-                    <a:pt x="4727086" y="3307474"/>
-                  </a:lnTo>
-                  <a:lnTo>
-                    <a:pt x="4655464" y="3294266"/>
-                  </a:lnTo>
-                  <a:lnTo>
-                    <a:pt x="4583841" y="3280069"/>
-                  </a:lnTo>
-                  <a:lnTo>
-                    <a:pt x="4512219" y="3264809"/>
-                  </a:lnTo>
-                  <a:lnTo>
-                    <a:pt x="4440596" y="3248404"/>
-                  </a:lnTo>
-                  <a:lnTo>
-                    <a:pt x="4368974" y="3230771"/>
-                  </a:lnTo>
-                  <a:lnTo>
-                    <a:pt x="4297351" y="3211817"/>
-                  </a:lnTo>
-                  <a:lnTo>
-                    <a:pt x="4225729" y="3191442"/>
-                  </a:lnTo>
-                  <a:lnTo>
-                    <a:pt x="4154106" y="3169541"/>
-                  </a:lnTo>
-                  <a:lnTo>
-                    <a:pt x="4082483" y="3145998"/>
-                  </a:lnTo>
-                  <a:lnTo>
-                    <a:pt x="4010861" y="3120692"/>
-                  </a:lnTo>
-                  <a:lnTo>
-                    <a:pt x="3939238" y="3093490"/>
-                  </a:lnTo>
-                  <a:lnTo>
-                    <a:pt x="3867616" y="3064249"/>
-                  </a:lnTo>
-                  <a:lnTo>
-                    <a:pt x="3795993" y="3032818"/>
-                  </a:lnTo>
-                  <a:lnTo>
-                    <a:pt x="3724371" y="2999032"/>
-                  </a:lnTo>
-                  <a:lnTo>
-                    <a:pt x="3652748" y="2962714"/>
-                  </a:lnTo>
-                  <a:lnTo>
-                    <a:pt x="3581126" y="2923675"/>
-                  </a:lnTo>
-                  <a:lnTo>
-                    <a:pt x="3509503" y="2881711"/>
-                  </a:lnTo>
-                  <a:lnTo>
-                    <a:pt x="3437881" y="2836602"/>
-                  </a:lnTo>
-                  <a:lnTo>
-                    <a:pt x="3366258" y="2788114"/>
-                  </a:lnTo>
-                  <a:lnTo>
-                    <a:pt x="3294636" y="2735993"/>
-                  </a:lnTo>
-                  <a:lnTo>
-                    <a:pt x="3223013" y="2679967"/>
-                  </a:lnTo>
-                  <a:lnTo>
-                    <a:pt x="3151391" y="2678217"/>
-                  </a:lnTo>
-                  <a:lnTo>
-                    <a:pt x="3079768" y="2718921"/>
-                  </a:lnTo>
-                  <a:lnTo>
-                    <a:pt x="3008146" y="2757568"/>
-                  </a:lnTo>
-                  <a:lnTo>
-                    <a:pt x="2936523" y="2794262"/>
-                  </a:lnTo>
-                  <a:lnTo>
-                    <a:pt x="2864901" y="2829103"/>
-                  </a:lnTo>
-                  <a:lnTo>
-                    <a:pt x="2793278" y="2862182"/>
-                  </a:lnTo>
-                  <a:lnTo>
-                    <a:pt x="2721655" y="2893590"/>
-                  </a:lnTo>
-                  <a:lnTo>
-                    <a:pt x="2650033" y="2923412"/>
-                  </a:lnTo>
-                  <a:lnTo>
-                    <a:pt x="2578410" y="2951726"/>
-                  </a:lnTo>
-                  <a:lnTo>
-                    <a:pt x="2506788" y="2978609"/>
-                  </a:lnTo>
-                  <a:lnTo>
-                    <a:pt x="2435165" y="3004134"/>
-                  </a:lnTo>
-                  <a:lnTo>
-                    <a:pt x="2363543" y="3028369"/>
-                  </a:lnTo>
-                  <a:lnTo>
-                    <a:pt x="2291920" y="3051380"/>
-                  </a:lnTo>
-                  <a:lnTo>
-                    <a:pt x="2220298" y="3073228"/>
-                  </a:lnTo>
-                  <a:lnTo>
-                    <a:pt x="2148675" y="3093972"/>
-                  </a:lnTo>
-                  <a:lnTo>
-                    <a:pt x="2077053" y="3113667"/>
-                  </a:lnTo>
-                  <a:lnTo>
-                    <a:pt x="2005430" y="3132368"/>
-                  </a:lnTo>
-                  <a:lnTo>
-                    <a:pt x="1933808" y="3150123"/>
-                  </a:lnTo>
-                  <a:lnTo>
-                    <a:pt x="1862185" y="3166981"/>
-                  </a:lnTo>
-                  <a:lnTo>
-                    <a:pt x="1790563" y="3182988"/>
-                  </a:lnTo>
-                  <a:lnTo>
-                    <a:pt x="1718940" y="3198185"/>
-                  </a:lnTo>
-                  <a:lnTo>
-                    <a:pt x="1647318" y="3212615"/>
-                  </a:lnTo>
-                  <a:lnTo>
-                    <a:pt x="1575695" y="3226315"/>
-                  </a:lnTo>
-                  <a:lnTo>
-                    <a:pt x="1504073" y="3239324"/>
-                  </a:lnTo>
-                  <a:lnTo>
-                    <a:pt x="1432450" y="3251674"/>
-                  </a:lnTo>
-                  <a:lnTo>
-                    <a:pt x="1360827" y="3263401"/>
-                  </a:lnTo>
-                  <a:lnTo>
-                    <a:pt x="1289205" y="3274535"/>
-                  </a:lnTo>
-                  <a:lnTo>
-                    <a:pt x="1217582" y="3285107"/>
-                  </a:lnTo>
-                  <a:lnTo>
-                    <a:pt x="1145960" y="3295144"/>
-                  </a:lnTo>
-                  <a:lnTo>
-                    <a:pt x="1074337" y="3304675"/>
-                  </a:lnTo>
-                  <a:lnTo>
-                    <a:pt x="1002715" y="3313723"/>
-                  </a:lnTo>
-                  <a:lnTo>
-                    <a:pt x="931092" y="3322315"/>
-                  </a:lnTo>
-                  <a:lnTo>
-                    <a:pt x="859470" y="3330472"/>
-                  </a:lnTo>
-                  <a:lnTo>
-                    <a:pt x="787847" y="3338217"/>
-                  </a:lnTo>
-                  <a:lnTo>
-                    <a:pt x="716225" y="3345571"/>
-                  </a:lnTo>
-                  <a:lnTo>
-                    <a:pt x="644602" y="3352553"/>
-                  </a:lnTo>
-                  <a:lnTo>
-                    <a:pt x="572980" y="3359182"/>
-                  </a:lnTo>
-                  <a:lnTo>
-                    <a:pt x="501357" y="3365477"/>
-                  </a:lnTo>
-                  <a:lnTo>
-                    <a:pt x="429735" y="3371453"/>
-                  </a:lnTo>
-                  <a:lnTo>
-                    <a:pt x="358112" y="3377127"/>
-                  </a:lnTo>
-                  <a:lnTo>
-                    <a:pt x="286490" y="3382515"/>
-                  </a:lnTo>
-                  <a:lnTo>
-                    <a:pt x="214867" y="3387630"/>
-                  </a:lnTo>
-                  <a:lnTo>
-                    <a:pt x="143245" y="3392487"/>
-                  </a:lnTo>
-                  <a:lnTo>
-                    <a:pt x="71622" y="3397098"/>
-                  </a:lnTo>
-                  <a:lnTo>
-                    <a:pt x="0" y="3401477"/>
+                    <a:pt x="7090630" y="3470352"/>
+                  </a:lnTo>
+                  <a:lnTo>
+                    <a:pt x="7019007" y="3469296"/>
+                  </a:lnTo>
+                  <a:lnTo>
+                    <a:pt x="6947385" y="3468157"/>
+                  </a:lnTo>
+                  <a:lnTo>
+                    <a:pt x="6875762" y="3466928"/>
+                  </a:lnTo>
+                  <a:lnTo>
+                    <a:pt x="6804139" y="3465602"/>
+                  </a:lnTo>
+                  <a:lnTo>
+                    <a:pt x="6732517" y="3464171"/>
+                  </a:lnTo>
+                  <a:lnTo>
+                    <a:pt x="6660894" y="3462628"/>
+                  </a:lnTo>
+                  <a:lnTo>
+                    <a:pt x="6589272" y="3460964"/>
+                  </a:lnTo>
+                  <a:lnTo>
+                    <a:pt x="6517649" y="3459168"/>
+                  </a:lnTo>
+                  <a:lnTo>
+                    <a:pt x="6446027" y="3457230"/>
+                  </a:lnTo>
+                  <a:lnTo>
+                    <a:pt x="6374404" y="3455140"/>
+                  </a:lnTo>
+                  <a:lnTo>
+                    <a:pt x="6302782" y="3452885"/>
+                  </a:lnTo>
+                  <a:lnTo>
+                    <a:pt x="6231159" y="3450452"/>
+                  </a:lnTo>
+                  <a:lnTo>
+                    <a:pt x="6159537" y="3447827"/>
+                  </a:lnTo>
+                  <a:lnTo>
+                    <a:pt x="6087914" y="3444995"/>
+                  </a:lnTo>
+                  <a:lnTo>
+                    <a:pt x="6016292" y="3441941"/>
+                  </a:lnTo>
+                  <a:lnTo>
+                    <a:pt x="5944669" y="3438645"/>
+                  </a:lnTo>
+                  <a:lnTo>
+                    <a:pt x="5873047" y="3435089"/>
+                  </a:lnTo>
+                  <a:lnTo>
+                    <a:pt x="5801424" y="3431254"/>
+                  </a:lnTo>
+                  <a:lnTo>
+                    <a:pt x="5729802" y="3427116"/>
+                  </a:lnTo>
+                  <a:lnTo>
+                    <a:pt x="5658179" y="3422651"/>
+                  </a:lnTo>
+                  <a:lnTo>
+                    <a:pt x="5586557" y="3417835"/>
+                  </a:lnTo>
+                  <a:lnTo>
+                    <a:pt x="5514934" y="3412639"/>
+                  </a:lnTo>
+                  <a:lnTo>
+                    <a:pt x="5443311" y="3407034"/>
+                  </a:lnTo>
+                  <a:lnTo>
+                    <a:pt x="5371689" y="3400986"/>
+                  </a:lnTo>
+                  <a:lnTo>
+                    <a:pt x="5300066" y="3394462"/>
+                  </a:lnTo>
+                  <a:lnTo>
+                    <a:pt x="5228444" y="3387424"/>
+                  </a:lnTo>
+                  <a:lnTo>
+                    <a:pt x="5156821" y="3379831"/>
+                  </a:lnTo>
+                  <a:lnTo>
+                    <a:pt x="5085199" y="3371639"/>
+                  </a:lnTo>
+                  <a:lnTo>
+                    <a:pt x="5013576" y="3362801"/>
+                  </a:lnTo>
+                  <a:lnTo>
+                    <a:pt x="4941954" y="3353267"/>
+                  </a:lnTo>
+                  <a:lnTo>
+                    <a:pt x="4870331" y="3342981"/>
+                  </a:lnTo>
+                  <a:lnTo>
+                    <a:pt x="4798709" y="3331884"/>
+                  </a:lnTo>
+                  <a:lnTo>
+                    <a:pt x="4727086" y="3319913"/>
+                  </a:lnTo>
+                  <a:lnTo>
+                    <a:pt x="4655464" y="3306997"/>
+                  </a:lnTo>
+                  <a:lnTo>
+                    <a:pt x="4583841" y="3293064"/>
+                  </a:lnTo>
+                  <a:lnTo>
+                    <a:pt x="4512219" y="3278032"/>
+                  </a:lnTo>
+                  <a:lnTo>
+                    <a:pt x="4440596" y="3261815"/>
+                  </a:lnTo>
+                  <a:lnTo>
+                    <a:pt x="4368974" y="3244320"/>
+                  </a:lnTo>
+                  <a:lnTo>
+                    <a:pt x="4297351" y="3225446"/>
+                  </a:lnTo>
+                  <a:lnTo>
+                    <a:pt x="4225729" y="3205083"/>
+                  </a:lnTo>
+                  <a:lnTo>
+                    <a:pt x="4154106" y="3183116"/>
+                  </a:lnTo>
+                  <a:lnTo>
+                    <a:pt x="4082483" y="3159417"/>
+                  </a:lnTo>
+                  <a:lnTo>
+                    <a:pt x="4010861" y="3133849"/>
+                  </a:lnTo>
+                  <a:lnTo>
+                    <a:pt x="3939238" y="3106266"/>
+                  </a:lnTo>
+                  <a:lnTo>
+                    <a:pt x="3867616" y="3076509"/>
+                  </a:lnTo>
+                  <a:lnTo>
+                    <a:pt x="3795993" y="3044406"/>
+                  </a:lnTo>
+                  <a:lnTo>
+                    <a:pt x="3724371" y="3009772"/>
+                  </a:lnTo>
+                  <a:lnTo>
+                    <a:pt x="3652748" y="2972407"/>
+                  </a:lnTo>
+                  <a:lnTo>
+                    <a:pt x="3581126" y="2932098"/>
+                  </a:lnTo>
+                  <a:lnTo>
+                    <a:pt x="3509503" y="2888610"/>
+                  </a:lnTo>
+                  <a:lnTo>
+                    <a:pt x="3437881" y="2841695"/>
+                  </a:lnTo>
+                  <a:lnTo>
+                    <a:pt x="3366258" y="2791081"/>
+                  </a:lnTo>
+                  <a:lnTo>
+                    <a:pt x="3294636" y="2736477"/>
+                  </a:lnTo>
+                  <a:lnTo>
+                    <a:pt x="3223013" y="2677568"/>
+                  </a:lnTo>
+                  <a:lnTo>
+                    <a:pt x="3151391" y="2681097"/>
+                  </a:lnTo>
+                  <a:lnTo>
+                    <a:pt x="3079768" y="2722226"/>
+                  </a:lnTo>
+                  <a:lnTo>
+                    <a:pt x="3008146" y="2761247"/>
+                  </a:lnTo>
+                  <a:lnTo>
+                    <a:pt x="2936523" y="2798269"/>
+                  </a:lnTo>
+                  <a:lnTo>
+                    <a:pt x="2864901" y="2833394"/>
+                  </a:lnTo>
+                  <a:lnTo>
+                    <a:pt x="2793278" y="2866719"/>
+                  </a:lnTo>
+                  <a:lnTo>
+                    <a:pt x="2721655" y="2898336"/>
+                  </a:lnTo>
+                  <a:lnTo>
+                    <a:pt x="2650033" y="2928333"/>
+                  </a:lnTo>
+                  <a:lnTo>
+                    <a:pt x="2578410" y="2956793"/>
+                  </a:lnTo>
+                  <a:lnTo>
+                    <a:pt x="2506788" y="2983795"/>
+                  </a:lnTo>
+                  <a:lnTo>
+                    <a:pt x="2435165" y="3009413"/>
+                  </a:lnTo>
+                  <a:lnTo>
+                    <a:pt x="2363543" y="3033719"/>
+                  </a:lnTo>
+                  <a:lnTo>
+                    <a:pt x="2291920" y="3056779"/>
+                  </a:lnTo>
+                  <a:lnTo>
+                    <a:pt x="2220298" y="3078657"/>
+                  </a:lnTo>
+                  <a:lnTo>
+                    <a:pt x="2148675" y="3099415"/>
+                  </a:lnTo>
+                  <a:lnTo>
+                    <a:pt x="2077053" y="3119108"/>
+                  </a:lnTo>
+                  <a:lnTo>
+                    <a:pt x="2005430" y="3137793"/>
+                  </a:lnTo>
+                  <a:lnTo>
+                    <a:pt x="1933808" y="3155520"/>
+                  </a:lnTo>
+                  <a:lnTo>
+                    <a:pt x="1862185" y="3172339"/>
+                  </a:lnTo>
+                  <a:lnTo>
+                    <a:pt x="1790563" y="3188296"/>
+                  </a:lnTo>
+                  <a:lnTo>
+                    <a:pt x="1718940" y="3203435"/>
+                  </a:lnTo>
+                  <a:lnTo>
+                    <a:pt x="1647318" y="3217798"/>
+                  </a:lnTo>
+                  <a:lnTo>
+                    <a:pt x="1575695" y="3231426"/>
+                  </a:lnTo>
+                  <a:lnTo>
+                    <a:pt x="1504073" y="3244355"/>
+                  </a:lnTo>
+                  <a:lnTo>
+                    <a:pt x="1432450" y="3256622"/>
+                  </a:lnTo>
+                  <a:lnTo>
+                    <a:pt x="1360827" y="3268260"/>
+                  </a:lnTo>
+                  <a:lnTo>
+                    <a:pt x="1289205" y="3279302"/>
+                  </a:lnTo>
+                  <a:lnTo>
+                    <a:pt x="1217582" y="3289778"/>
+                  </a:lnTo>
+                  <a:lnTo>
+                    <a:pt x="1145960" y="3299717"/>
+                  </a:lnTo>
+                  <a:lnTo>
+                    <a:pt x="1074337" y="3309147"/>
+                  </a:lnTo>
+                  <a:lnTo>
+                    <a:pt x="1002715" y="3318094"/>
+                  </a:lnTo>
+                  <a:lnTo>
+                    <a:pt x="931092" y="3326582"/>
+                  </a:lnTo>
+                  <a:lnTo>
+                    <a:pt x="859470" y="3334635"/>
+                  </a:lnTo>
+                  <a:lnTo>
+                    <a:pt x="787847" y="3342276"/>
+                  </a:lnTo>
+                  <a:lnTo>
+                    <a:pt x="716225" y="3349525"/>
+                  </a:lnTo>
+                  <a:lnTo>
+                    <a:pt x="644602" y="3356403"/>
+                  </a:lnTo>
+                  <a:lnTo>
+                    <a:pt x="572980" y="3362928"/>
+                  </a:lnTo>
+                  <a:lnTo>
+                    <a:pt x="501357" y="3369119"/>
+                  </a:lnTo>
+                  <a:lnTo>
+                    <a:pt x="429735" y="3374993"/>
+                  </a:lnTo>
+                  <a:lnTo>
+                    <a:pt x="358112" y="3380565"/>
+                  </a:lnTo>
+                  <a:lnTo>
+                    <a:pt x="286490" y="3385852"/>
+                  </a:lnTo>
+                  <a:lnTo>
+                    <a:pt x="214867" y="3390869"/>
+                  </a:lnTo>
+                  <a:lnTo>
+                    <a:pt x="143245" y="3395628"/>
+                  </a:lnTo>
+                  <a:lnTo>
+                    <a:pt x="71622" y="3400143"/>
+                  </a:lnTo>
+                  <a:lnTo>
+                    <a:pt x="0" y="3404427"/>
                   </a:lnTo>
                   <a:close/>
                 </a:path>
@@ -3486,162 +3480,156 @@
           </p:nvSpPr>
           <p:spPr>
             <a:xfrm>
-              <a:off x="2941841" y="2073503"/>
-              <a:ext cx="3403961" cy="2635346"/>
+              <a:off x="3014151" y="2073503"/>
+              <a:ext cx="3307920" cy="2637747"/>
             </a:xfrm>
             <a:custGeom>
               <a:avLst/>
               <a:pathLst>
-                <a:path w="3403961" h="2635346">
+                <a:path w="3307920" h="2637747">
                   <a:moveTo>
                     <a:pt x="0" y="0"/>
                   </a:moveTo>
                   <a:lnTo>
-                    <a:pt x="20771" y="74089"/>
-                  </a:lnTo>
-                  <a:lnTo>
-                    <a:pt x="92393" y="311754"/>
-                  </a:lnTo>
-                  <a:lnTo>
-                    <a:pt x="164016" y="532854"/>
-                  </a:lnTo>
-                  <a:lnTo>
-                    <a:pt x="235638" y="738542"/>
-                  </a:lnTo>
-                  <a:lnTo>
-                    <a:pt x="307261" y="929892"/>
-                  </a:lnTo>
-                  <a:lnTo>
-                    <a:pt x="378883" y="1107905"/>
-                  </a:lnTo>
-                  <a:lnTo>
-                    <a:pt x="450506" y="1273510"/>
-                  </a:lnTo>
-                  <a:lnTo>
-                    <a:pt x="522128" y="1427572"/>
-                  </a:lnTo>
-                  <a:lnTo>
-                    <a:pt x="593751" y="1570895"/>
-                  </a:lnTo>
-                  <a:lnTo>
-                    <a:pt x="665373" y="1704227"/>
-                  </a:lnTo>
-                  <a:lnTo>
-                    <a:pt x="736996" y="1828266"/>
-                  </a:lnTo>
-                  <a:lnTo>
-                    <a:pt x="808618" y="1943659"/>
-                  </a:lnTo>
-                  <a:lnTo>
-                    <a:pt x="880241" y="2051009"/>
-                  </a:lnTo>
-                  <a:lnTo>
-                    <a:pt x="951863" y="2150876"/>
-                  </a:lnTo>
-                  <a:lnTo>
-                    <a:pt x="1023486" y="2243782"/>
-                  </a:lnTo>
-                  <a:lnTo>
-                    <a:pt x="1095108" y="2330212"/>
-                  </a:lnTo>
-                  <a:lnTo>
-                    <a:pt x="1166731" y="2410618"/>
-                  </a:lnTo>
-                  <a:lnTo>
-                    <a:pt x="1238354" y="2485419"/>
-                  </a:lnTo>
-                  <a:lnTo>
-                    <a:pt x="1309976" y="2555006"/>
-                  </a:lnTo>
-                  <a:lnTo>
-                    <a:pt x="1381599" y="2619742"/>
-                  </a:lnTo>
-                  <a:lnTo>
-                    <a:pt x="1453221" y="2635346"/>
-                  </a:lnTo>
-                  <a:lnTo>
-                    <a:pt x="1524844" y="2590195"/>
-                  </a:lnTo>
-                  <a:lnTo>
-                    <a:pt x="1596466" y="2542640"/>
-                  </a:lnTo>
-                  <a:lnTo>
-                    <a:pt x="1668089" y="2492554"/>
-                  </a:lnTo>
-                  <a:lnTo>
-                    <a:pt x="1739711" y="2439803"/>
-                  </a:lnTo>
-                  <a:lnTo>
-                    <a:pt x="1811334" y="2384244"/>
-                  </a:lnTo>
-                  <a:lnTo>
-                    <a:pt x="1882956" y="2325728"/>
-                  </a:lnTo>
-                  <a:lnTo>
-                    <a:pt x="1954579" y="2264099"/>
-                  </a:lnTo>
-                  <a:lnTo>
-                    <a:pt x="2026201" y="2199189"/>
-                  </a:lnTo>
-                  <a:lnTo>
-                    <a:pt x="2097824" y="2130825"/>
-                  </a:lnTo>
-                  <a:lnTo>
-                    <a:pt x="2169446" y="2058822"/>
-                  </a:lnTo>
-                  <a:lnTo>
-                    <a:pt x="2241069" y="1982987"/>
-                  </a:lnTo>
-                  <a:lnTo>
-                    <a:pt x="2312691" y="1903117"/>
-                  </a:lnTo>
-                  <a:lnTo>
-                    <a:pt x="2384314" y="1818996"/>
-                  </a:lnTo>
-                  <a:lnTo>
-                    <a:pt x="2455936" y="1730398"/>
-                  </a:lnTo>
-                  <a:lnTo>
-                    <a:pt x="2527559" y="1637084"/>
-                  </a:lnTo>
-                  <a:lnTo>
-                    <a:pt x="2599182" y="1538805"/>
-                  </a:lnTo>
-                  <a:lnTo>
-                    <a:pt x="2670804" y="1435295"/>
-                  </a:lnTo>
-                  <a:lnTo>
-                    <a:pt x="2742427" y="1326276"/>
-                  </a:lnTo>
-                  <a:lnTo>
-                    <a:pt x="2814049" y="1211456"/>
-                  </a:lnTo>
-                  <a:lnTo>
-                    <a:pt x="2885672" y="1090524"/>
-                  </a:lnTo>
-                  <a:lnTo>
-                    <a:pt x="2957294" y="963157"/>
-                  </a:lnTo>
-                  <a:lnTo>
-                    <a:pt x="3028917" y="829011"/>
-                  </a:lnTo>
-                  <a:lnTo>
-                    <a:pt x="3100539" y="687726"/>
-                  </a:lnTo>
-                  <a:lnTo>
-                    <a:pt x="3172162" y="538921"/>
-                  </a:lnTo>
-                  <a:lnTo>
-                    <a:pt x="3243784" y="382198"/>
-                  </a:lnTo>
-                  <a:lnTo>
-                    <a:pt x="3315407" y="217133"/>
-                  </a:lnTo>
-                  <a:lnTo>
-                    <a:pt x="3387029" y="43284"/>
-                  </a:lnTo>
-                  <a:lnTo>
-                    <a:pt x="3403961" y="0"/>
+                    <a:pt x="20083" y="75343"/>
+                  </a:lnTo>
+                  <a:lnTo>
+                    <a:pt x="91706" y="324400"/>
+                  </a:lnTo>
+                  <a:lnTo>
+                    <a:pt x="163328" y="555257"/>
+                  </a:lnTo>
+                  <a:lnTo>
+                    <a:pt x="234951" y="769246"/>
+                  </a:lnTo>
+                  <a:lnTo>
+                    <a:pt x="306573" y="967598"/>
+                  </a:lnTo>
+                  <a:lnTo>
+                    <a:pt x="378196" y="1151456"/>
+                  </a:lnTo>
+                  <a:lnTo>
+                    <a:pt x="449818" y="1321880"/>
+                  </a:lnTo>
+                  <a:lnTo>
+                    <a:pt x="521441" y="1479850"/>
+                  </a:lnTo>
+                  <a:lnTo>
+                    <a:pt x="593063" y="1626278"/>
+                  </a:lnTo>
+                  <a:lnTo>
+                    <a:pt x="664686" y="1762005"/>
+                  </a:lnTo>
+                  <a:lnTo>
+                    <a:pt x="736308" y="1887815"/>
+                  </a:lnTo>
+                  <a:lnTo>
+                    <a:pt x="807931" y="2004432"/>
+                  </a:lnTo>
+                  <a:lnTo>
+                    <a:pt x="879554" y="2112528"/>
+                  </a:lnTo>
+                  <a:lnTo>
+                    <a:pt x="951176" y="2212724"/>
+                  </a:lnTo>
+                  <a:lnTo>
+                    <a:pt x="1022799" y="2305600"/>
+                  </a:lnTo>
+                  <a:lnTo>
+                    <a:pt x="1094421" y="2391688"/>
+                  </a:lnTo>
+                  <a:lnTo>
+                    <a:pt x="1166044" y="2471487"/>
+                  </a:lnTo>
+                  <a:lnTo>
+                    <a:pt x="1237666" y="2545454"/>
+                  </a:lnTo>
+                  <a:lnTo>
+                    <a:pt x="1309289" y="2614016"/>
+                  </a:lnTo>
+                  <a:lnTo>
+                    <a:pt x="1380911" y="2637747"/>
+                  </a:lnTo>
+                  <a:lnTo>
+                    <a:pt x="1452534" y="2592056"/>
+                  </a:lnTo>
+                  <a:lnTo>
+                    <a:pt x="1524156" y="2543897"/>
+                  </a:lnTo>
+                  <a:lnTo>
+                    <a:pt x="1595779" y="2493137"/>
+                  </a:lnTo>
+                  <a:lnTo>
+                    <a:pt x="1667401" y="2439635"/>
+                  </a:lnTo>
+                  <a:lnTo>
+                    <a:pt x="1739024" y="2383244"/>
+                  </a:lnTo>
+                  <a:lnTo>
+                    <a:pt x="1810646" y="2323807"/>
+                  </a:lnTo>
+                  <a:lnTo>
+                    <a:pt x="1882269" y="2261160"/>
+                  </a:lnTo>
+                  <a:lnTo>
+                    <a:pt x="1953891" y="2195130"/>
+                  </a:lnTo>
+                  <a:lnTo>
+                    <a:pt x="2025514" y="2125533"/>
+                  </a:lnTo>
+                  <a:lnTo>
+                    <a:pt x="2097136" y="2052177"/>
+                  </a:lnTo>
+                  <a:lnTo>
+                    <a:pt x="2168759" y="1974860"/>
+                  </a:lnTo>
+                  <a:lnTo>
+                    <a:pt x="2240382" y="1893367"/>
+                  </a:lnTo>
+                  <a:lnTo>
+                    <a:pt x="2312004" y="1807472"/>
+                  </a:lnTo>
+                  <a:lnTo>
+                    <a:pt x="2383627" y="1716939"/>
+                  </a:lnTo>
+                  <a:lnTo>
+                    <a:pt x="2455249" y="1621516"/>
+                  </a:lnTo>
+                  <a:lnTo>
+                    <a:pt x="2526872" y="1520939"/>
+                  </a:lnTo>
+                  <a:lnTo>
+                    <a:pt x="2598494" y="1414930"/>
+                  </a:lnTo>
+                  <a:lnTo>
+                    <a:pt x="2670117" y="1303196"/>
+                  </a:lnTo>
+                  <a:lnTo>
+                    <a:pt x="2741739" y="1185427"/>
+                  </a:lnTo>
+                  <a:lnTo>
+                    <a:pt x="2813362" y="1061297"/>
+                  </a:lnTo>
+                  <a:lnTo>
+                    <a:pt x="2884984" y="930464"/>
+                  </a:lnTo>
+                  <a:lnTo>
+                    <a:pt x="2956607" y="792564"/>
+                  </a:lnTo>
+                  <a:lnTo>
+                    <a:pt x="3028229" y="647217"/>
+                  </a:lnTo>
+                  <a:lnTo>
+                    <a:pt x="3099852" y="494019"/>
+                  </a:lnTo>
+                  <a:lnTo>
+                    <a:pt x="3171474" y="332548"/>
+                  </a:lnTo>
+                  <a:lnTo>
+                    <a:pt x="3243097" y="162355"/>
+                  </a:lnTo>
+                  <a:lnTo>
+                    <a:pt x="3307920" y="0"/>
                   </a:lnTo>
                 </a:path>
               </a:pathLst>
@@ -3661,312 +3649,312 @@
           </p:nvSpPr>
           <p:spPr>
             <a:xfrm>
-              <a:off x="1172049" y="4751720"/>
-              <a:ext cx="7090630" cy="789285"/>
+              <a:off x="1172049" y="4751071"/>
+              <a:ext cx="7090630" cy="792783"/>
             </a:xfrm>
             <a:custGeom>
               <a:avLst/>
               <a:pathLst>
-                <a:path w="7090630" h="789285">
+                <a:path w="7090630" h="792783">
                   <a:moveTo>
-                    <a:pt x="7090630" y="789285"/>
+                    <a:pt x="7090630" y="792783"/>
                   </a:moveTo>
                   <a:lnTo>
-                    <a:pt x="7019007" y="788068"/>
-                  </a:lnTo>
-                  <a:lnTo>
-                    <a:pt x="6947385" y="786760"/>
-                  </a:lnTo>
-                  <a:lnTo>
-                    <a:pt x="6875762" y="785354"/>
-                  </a:lnTo>
-                  <a:lnTo>
-                    <a:pt x="6804139" y="783842"/>
-                  </a:lnTo>
-                  <a:lnTo>
-                    <a:pt x="6732517" y="782217"/>
-                  </a:lnTo>
-                  <a:lnTo>
-                    <a:pt x="6660894" y="780470"/>
-                  </a:lnTo>
-                  <a:lnTo>
-                    <a:pt x="6589272" y="778593"/>
-                  </a:lnTo>
-                  <a:lnTo>
-                    <a:pt x="6517649" y="776575"/>
-                  </a:lnTo>
-                  <a:lnTo>
-                    <a:pt x="6446027" y="774405"/>
-                  </a:lnTo>
-                  <a:lnTo>
-                    <a:pt x="6374404" y="772073"/>
-                  </a:lnTo>
-                  <a:lnTo>
-                    <a:pt x="6302782" y="769566"/>
-                  </a:lnTo>
-                  <a:lnTo>
-                    <a:pt x="6231159" y="766872"/>
-                  </a:lnTo>
-                  <a:lnTo>
-                    <a:pt x="6159537" y="763975"/>
-                  </a:lnTo>
-                  <a:lnTo>
-                    <a:pt x="6087914" y="760862"/>
-                  </a:lnTo>
-                  <a:lnTo>
-                    <a:pt x="6016292" y="757515"/>
-                  </a:lnTo>
-                  <a:lnTo>
-                    <a:pt x="5944669" y="753918"/>
-                  </a:lnTo>
-                  <a:lnTo>
-                    <a:pt x="5873047" y="750050"/>
-                  </a:lnTo>
-                  <a:lnTo>
-                    <a:pt x="5801424" y="745894"/>
-                  </a:lnTo>
-                  <a:lnTo>
-                    <a:pt x="5729802" y="741425"/>
-                  </a:lnTo>
-                  <a:lnTo>
-                    <a:pt x="5658179" y="736622"/>
-                  </a:lnTo>
-                  <a:lnTo>
-                    <a:pt x="5586557" y="731459"/>
-                  </a:lnTo>
-                  <a:lnTo>
-                    <a:pt x="5514934" y="725910"/>
-                  </a:lnTo>
-                  <a:lnTo>
-                    <a:pt x="5443311" y="719944"/>
-                  </a:lnTo>
-                  <a:lnTo>
-                    <a:pt x="5371689" y="713531"/>
-                  </a:lnTo>
-                  <a:lnTo>
-                    <a:pt x="5300066" y="706638"/>
-                  </a:lnTo>
-                  <a:lnTo>
-                    <a:pt x="5228444" y="699229"/>
-                  </a:lnTo>
-                  <a:lnTo>
-                    <a:pt x="5156821" y="691264"/>
-                  </a:lnTo>
-                  <a:lnTo>
-                    <a:pt x="5085199" y="682703"/>
-                  </a:lnTo>
-                  <a:lnTo>
-                    <a:pt x="5013576" y="673500"/>
-                  </a:lnTo>
-                  <a:lnTo>
-                    <a:pt x="4941954" y="663607"/>
-                  </a:lnTo>
-                  <a:lnTo>
-                    <a:pt x="4870331" y="652974"/>
-                  </a:lnTo>
-                  <a:lnTo>
-                    <a:pt x="4798709" y="641543"/>
-                  </a:lnTo>
-                  <a:lnTo>
-                    <a:pt x="4727086" y="629257"/>
-                  </a:lnTo>
-                  <a:lnTo>
-                    <a:pt x="4655464" y="616049"/>
-                  </a:lnTo>
-                  <a:lnTo>
-                    <a:pt x="4583841" y="601852"/>
-                  </a:lnTo>
-                  <a:lnTo>
-                    <a:pt x="4512219" y="586591"/>
-                  </a:lnTo>
-                  <a:lnTo>
-                    <a:pt x="4440596" y="570187"/>
-                  </a:lnTo>
-                  <a:lnTo>
-                    <a:pt x="4368974" y="552554"/>
-                  </a:lnTo>
-                  <a:lnTo>
-                    <a:pt x="4297351" y="533599"/>
-                  </a:lnTo>
-                  <a:lnTo>
-                    <a:pt x="4225729" y="513225"/>
-                  </a:lnTo>
-                  <a:lnTo>
-                    <a:pt x="4154106" y="491323"/>
-                  </a:lnTo>
-                  <a:lnTo>
-                    <a:pt x="4082483" y="467781"/>
-                  </a:lnTo>
-                  <a:lnTo>
-                    <a:pt x="4010861" y="442475"/>
-                  </a:lnTo>
-                  <a:lnTo>
-                    <a:pt x="3939238" y="415272"/>
-                  </a:lnTo>
-                  <a:lnTo>
-                    <a:pt x="3867616" y="386032"/>
-                  </a:lnTo>
-                  <a:lnTo>
-                    <a:pt x="3795993" y="354601"/>
-                  </a:lnTo>
-                  <a:lnTo>
-                    <a:pt x="3724371" y="320814"/>
-                  </a:lnTo>
-                  <a:lnTo>
-                    <a:pt x="3652748" y="284496"/>
-                  </a:lnTo>
-                  <a:lnTo>
-                    <a:pt x="3581126" y="245457"/>
-                  </a:lnTo>
-                  <a:lnTo>
-                    <a:pt x="3509503" y="203493"/>
-                  </a:lnTo>
-                  <a:lnTo>
-                    <a:pt x="3437881" y="158385"/>
-                  </a:lnTo>
-                  <a:lnTo>
-                    <a:pt x="3366258" y="109897"/>
-                  </a:lnTo>
-                  <a:lnTo>
-                    <a:pt x="3294636" y="57776"/>
-                  </a:lnTo>
-                  <a:lnTo>
-                    <a:pt x="3223013" y="1749"/>
-                  </a:lnTo>
-                  <a:lnTo>
-                    <a:pt x="3151391" y="0"/>
-                  </a:lnTo>
-                  <a:lnTo>
-                    <a:pt x="3079768" y="40704"/>
-                  </a:lnTo>
-                  <a:lnTo>
-                    <a:pt x="3008146" y="79351"/>
-                  </a:lnTo>
-                  <a:lnTo>
-                    <a:pt x="2936523" y="116045"/>
-                  </a:lnTo>
-                  <a:lnTo>
-                    <a:pt x="2864901" y="150885"/>
-                  </a:lnTo>
-                  <a:lnTo>
-                    <a:pt x="2793278" y="183965"/>
-                  </a:lnTo>
-                  <a:lnTo>
-                    <a:pt x="2721655" y="215373"/>
-                  </a:lnTo>
-                  <a:lnTo>
-                    <a:pt x="2650033" y="245194"/>
-                  </a:lnTo>
-                  <a:lnTo>
-                    <a:pt x="2578410" y="273508"/>
-                  </a:lnTo>
-                  <a:lnTo>
-                    <a:pt x="2506788" y="300392"/>
-                  </a:lnTo>
-                  <a:lnTo>
-                    <a:pt x="2435165" y="325917"/>
-                  </a:lnTo>
-                  <a:lnTo>
-                    <a:pt x="2363543" y="350152"/>
-                  </a:lnTo>
-                  <a:lnTo>
-                    <a:pt x="2291920" y="373163"/>
-                  </a:lnTo>
-                  <a:lnTo>
-                    <a:pt x="2220298" y="395010"/>
-                  </a:lnTo>
-                  <a:lnTo>
-                    <a:pt x="2148675" y="415754"/>
-                  </a:lnTo>
-                  <a:lnTo>
-                    <a:pt x="2077053" y="435450"/>
-                  </a:lnTo>
-                  <a:lnTo>
-                    <a:pt x="2005430" y="454150"/>
-                  </a:lnTo>
-                  <a:lnTo>
-                    <a:pt x="1933808" y="471906"/>
-                  </a:lnTo>
-                  <a:lnTo>
-                    <a:pt x="1862185" y="488764"/>
-                  </a:lnTo>
-                  <a:lnTo>
-                    <a:pt x="1790563" y="504770"/>
-                  </a:lnTo>
-                  <a:lnTo>
-                    <a:pt x="1718940" y="519968"/>
-                  </a:lnTo>
-                  <a:lnTo>
-                    <a:pt x="1647318" y="534398"/>
-                  </a:lnTo>
-                  <a:lnTo>
-                    <a:pt x="1575695" y="548098"/>
-                  </a:lnTo>
-                  <a:lnTo>
-                    <a:pt x="1504073" y="561106"/>
-                  </a:lnTo>
-                  <a:lnTo>
-                    <a:pt x="1432450" y="573457"/>
-                  </a:lnTo>
-                  <a:lnTo>
-                    <a:pt x="1360827" y="585184"/>
-                  </a:lnTo>
-                  <a:lnTo>
-                    <a:pt x="1289205" y="596318"/>
-                  </a:lnTo>
-                  <a:lnTo>
-                    <a:pt x="1217582" y="606890"/>
-                  </a:lnTo>
-                  <a:lnTo>
-                    <a:pt x="1145960" y="616927"/>
-                  </a:lnTo>
-                  <a:lnTo>
-                    <a:pt x="1074337" y="626457"/>
-                  </a:lnTo>
-                  <a:lnTo>
-                    <a:pt x="1002715" y="635506"/>
-                  </a:lnTo>
-                  <a:lnTo>
-                    <a:pt x="931092" y="644097"/>
-                  </a:lnTo>
-                  <a:lnTo>
-                    <a:pt x="859470" y="652255"/>
-                  </a:lnTo>
-                  <a:lnTo>
-                    <a:pt x="787847" y="660000"/>
-                  </a:lnTo>
-                  <a:lnTo>
-                    <a:pt x="716225" y="667353"/>
-                  </a:lnTo>
-                  <a:lnTo>
-                    <a:pt x="644602" y="674336"/>
-                  </a:lnTo>
-                  <a:lnTo>
-                    <a:pt x="572980" y="680965"/>
-                  </a:lnTo>
-                  <a:lnTo>
-                    <a:pt x="501357" y="687259"/>
-                  </a:lnTo>
-                  <a:lnTo>
-                    <a:pt x="429735" y="693236"/>
-                  </a:lnTo>
-                  <a:lnTo>
-                    <a:pt x="358112" y="698910"/>
-                  </a:lnTo>
-                  <a:lnTo>
-                    <a:pt x="286490" y="704297"/>
-                  </a:lnTo>
-                  <a:lnTo>
-                    <a:pt x="214867" y="709413"/>
-                  </a:lnTo>
-                  <a:lnTo>
-                    <a:pt x="143245" y="714270"/>
-                  </a:lnTo>
-                  <a:lnTo>
-                    <a:pt x="71622" y="718881"/>
-                  </a:lnTo>
-                  <a:lnTo>
-                    <a:pt x="0" y="723259"/>
+                    <a:pt x="7019007" y="791727"/>
+                  </a:lnTo>
+                  <a:lnTo>
+                    <a:pt x="6947385" y="790588"/>
+                  </a:lnTo>
+                  <a:lnTo>
+                    <a:pt x="6875762" y="789359"/>
+                  </a:lnTo>
+                  <a:lnTo>
+                    <a:pt x="6804139" y="788033"/>
+                  </a:lnTo>
+                  <a:lnTo>
+                    <a:pt x="6732517" y="786603"/>
+                  </a:lnTo>
+                  <a:lnTo>
+                    <a:pt x="6660894" y="785059"/>
+                  </a:lnTo>
+                  <a:lnTo>
+                    <a:pt x="6589272" y="783395"/>
+                  </a:lnTo>
+                  <a:lnTo>
+                    <a:pt x="6517649" y="781599"/>
+                  </a:lnTo>
+                  <a:lnTo>
+                    <a:pt x="6446027" y="779661"/>
+                  </a:lnTo>
+                  <a:lnTo>
+                    <a:pt x="6374404" y="777571"/>
+                  </a:lnTo>
+                  <a:lnTo>
+                    <a:pt x="6302782" y="775316"/>
+                  </a:lnTo>
+                  <a:lnTo>
+                    <a:pt x="6231159" y="772883"/>
+                  </a:lnTo>
+                  <a:lnTo>
+                    <a:pt x="6159537" y="770258"/>
+                  </a:lnTo>
+                  <a:lnTo>
+                    <a:pt x="6087914" y="767426"/>
+                  </a:lnTo>
+                  <a:lnTo>
+                    <a:pt x="6016292" y="764372"/>
+                  </a:lnTo>
+                  <a:lnTo>
+                    <a:pt x="5944669" y="761076"/>
+                  </a:lnTo>
+                  <a:lnTo>
+                    <a:pt x="5873047" y="757521"/>
+                  </a:lnTo>
+                  <a:lnTo>
+                    <a:pt x="5801424" y="753685"/>
+                  </a:lnTo>
+                  <a:lnTo>
+                    <a:pt x="5729802" y="749547"/>
+                  </a:lnTo>
+                  <a:lnTo>
+                    <a:pt x="5658179" y="745083"/>
+                  </a:lnTo>
+                  <a:lnTo>
+                    <a:pt x="5586557" y="740266"/>
+                  </a:lnTo>
+                  <a:lnTo>
+                    <a:pt x="5514934" y="735070"/>
+                  </a:lnTo>
+                  <a:lnTo>
+                    <a:pt x="5443311" y="729465"/>
+                  </a:lnTo>
+                  <a:lnTo>
+                    <a:pt x="5371689" y="723418"/>
+                  </a:lnTo>
+                  <a:lnTo>
+                    <a:pt x="5300066" y="716893"/>
+                  </a:lnTo>
+                  <a:lnTo>
+                    <a:pt x="5228444" y="709855"/>
+                  </a:lnTo>
+                  <a:lnTo>
+                    <a:pt x="5156821" y="702262"/>
+                  </a:lnTo>
+                  <a:lnTo>
+                    <a:pt x="5085199" y="694070"/>
+                  </a:lnTo>
+                  <a:lnTo>
+                    <a:pt x="5013576" y="685232"/>
+                  </a:lnTo>
+                  <a:lnTo>
+                    <a:pt x="4941954" y="675698"/>
+                  </a:lnTo>
+                  <a:lnTo>
+                    <a:pt x="4870331" y="665412"/>
+                  </a:lnTo>
+                  <a:lnTo>
+                    <a:pt x="4798709" y="654315"/>
+                  </a:lnTo>
+                  <a:lnTo>
+                    <a:pt x="4727086" y="642344"/>
+                  </a:lnTo>
+                  <a:lnTo>
+                    <a:pt x="4655464" y="629428"/>
+                  </a:lnTo>
+                  <a:lnTo>
+                    <a:pt x="4583841" y="615495"/>
+                  </a:lnTo>
+                  <a:lnTo>
+                    <a:pt x="4512219" y="600463"/>
+                  </a:lnTo>
+                  <a:lnTo>
+                    <a:pt x="4440596" y="584246"/>
+                  </a:lnTo>
+                  <a:lnTo>
+                    <a:pt x="4368974" y="566751"/>
+                  </a:lnTo>
+                  <a:lnTo>
+                    <a:pt x="4297351" y="547877"/>
+                  </a:lnTo>
+                  <a:lnTo>
+                    <a:pt x="4225729" y="527515"/>
+                  </a:lnTo>
+                  <a:lnTo>
+                    <a:pt x="4154106" y="505547"/>
+                  </a:lnTo>
+                  <a:lnTo>
+                    <a:pt x="4082483" y="481848"/>
+                  </a:lnTo>
+                  <a:lnTo>
+                    <a:pt x="4010861" y="456280"/>
+                  </a:lnTo>
+                  <a:lnTo>
+                    <a:pt x="3939238" y="428697"/>
+                  </a:lnTo>
+                  <a:lnTo>
+                    <a:pt x="3867616" y="398940"/>
+                  </a:lnTo>
+                  <a:lnTo>
+                    <a:pt x="3795993" y="366837"/>
+                  </a:lnTo>
+                  <a:lnTo>
+                    <a:pt x="3724371" y="332203"/>
+                  </a:lnTo>
+                  <a:lnTo>
+                    <a:pt x="3652748" y="294839"/>
+                  </a:lnTo>
+                  <a:lnTo>
+                    <a:pt x="3581126" y="254529"/>
+                  </a:lnTo>
+                  <a:lnTo>
+                    <a:pt x="3509503" y="211042"/>
+                  </a:lnTo>
+                  <a:lnTo>
+                    <a:pt x="3437881" y="164126"/>
+                  </a:lnTo>
+                  <a:lnTo>
+                    <a:pt x="3366258" y="113512"/>
+                  </a:lnTo>
+                  <a:lnTo>
+                    <a:pt x="3294636" y="58908"/>
+                  </a:lnTo>
+                  <a:lnTo>
+                    <a:pt x="3223013" y="0"/>
+                  </a:lnTo>
+                  <a:lnTo>
+                    <a:pt x="3151391" y="3529"/>
+                  </a:lnTo>
+                  <a:lnTo>
+                    <a:pt x="3079768" y="44657"/>
+                  </a:lnTo>
+                  <a:lnTo>
+                    <a:pt x="3008146" y="83679"/>
+                  </a:lnTo>
+                  <a:lnTo>
+                    <a:pt x="2936523" y="120700"/>
+                  </a:lnTo>
+                  <a:lnTo>
+                    <a:pt x="2864901" y="155825"/>
+                  </a:lnTo>
+                  <a:lnTo>
+                    <a:pt x="2793278" y="189150"/>
+                  </a:lnTo>
+                  <a:lnTo>
+                    <a:pt x="2721655" y="220767"/>
+                  </a:lnTo>
+                  <a:lnTo>
+                    <a:pt x="2650033" y="250765"/>
+                  </a:lnTo>
+                  <a:lnTo>
+                    <a:pt x="2578410" y="279225"/>
+                  </a:lnTo>
+                  <a:lnTo>
+                    <a:pt x="2506788" y="306226"/>
+                  </a:lnTo>
+                  <a:lnTo>
+                    <a:pt x="2435165" y="331845"/>
+                  </a:lnTo>
+                  <a:lnTo>
+                    <a:pt x="2363543" y="356150"/>
+                  </a:lnTo>
+                  <a:lnTo>
+                    <a:pt x="2291920" y="379210"/>
+                  </a:lnTo>
+                  <a:lnTo>
+                    <a:pt x="2220298" y="401088"/>
+                  </a:lnTo>
+                  <a:lnTo>
+                    <a:pt x="2148675" y="421846"/>
+                  </a:lnTo>
+                  <a:lnTo>
+                    <a:pt x="2077053" y="441539"/>
+                  </a:lnTo>
+                  <a:lnTo>
+                    <a:pt x="2005430" y="460224"/>
+                  </a:lnTo>
+                  <a:lnTo>
+                    <a:pt x="1933808" y="477951"/>
+                  </a:lnTo>
+                  <a:lnTo>
+                    <a:pt x="1862185" y="494770"/>
+                  </a:lnTo>
+                  <a:lnTo>
+                    <a:pt x="1790563" y="510727"/>
+                  </a:lnTo>
+                  <a:lnTo>
+                    <a:pt x="1718940" y="525866"/>
+                  </a:lnTo>
+                  <a:lnTo>
+                    <a:pt x="1647318" y="540230"/>
+                  </a:lnTo>
+                  <a:lnTo>
+                    <a:pt x="1575695" y="553857"/>
+                  </a:lnTo>
+                  <a:lnTo>
+                    <a:pt x="1504073" y="566786"/>
+                  </a:lnTo>
+                  <a:lnTo>
+                    <a:pt x="1432450" y="579053"/>
+                  </a:lnTo>
+                  <a:lnTo>
+                    <a:pt x="1360827" y="590691"/>
+                  </a:lnTo>
+                  <a:lnTo>
+                    <a:pt x="1289205" y="601733"/>
+                  </a:lnTo>
+                  <a:lnTo>
+                    <a:pt x="1217582" y="612209"/>
+                  </a:lnTo>
+                  <a:lnTo>
+                    <a:pt x="1145960" y="622148"/>
+                  </a:lnTo>
+                  <a:lnTo>
+                    <a:pt x="1074337" y="631578"/>
+                  </a:lnTo>
+                  <a:lnTo>
+                    <a:pt x="1002715" y="640525"/>
+                  </a:lnTo>
+                  <a:lnTo>
+                    <a:pt x="931092" y="649013"/>
+                  </a:lnTo>
+                  <a:lnTo>
+                    <a:pt x="859470" y="657066"/>
+                  </a:lnTo>
+                  <a:lnTo>
+                    <a:pt x="787847" y="664707"/>
+                  </a:lnTo>
+                  <a:lnTo>
+                    <a:pt x="716225" y="671956"/>
+                  </a:lnTo>
+                  <a:lnTo>
+                    <a:pt x="644602" y="678834"/>
+                  </a:lnTo>
+                  <a:lnTo>
+                    <a:pt x="572980" y="685359"/>
+                  </a:lnTo>
+                  <a:lnTo>
+                    <a:pt x="501357" y="691550"/>
+                  </a:lnTo>
+                  <a:lnTo>
+                    <a:pt x="429735" y="697424"/>
+                  </a:lnTo>
+                  <a:lnTo>
+                    <a:pt x="358112" y="702996"/>
+                  </a:lnTo>
+                  <a:lnTo>
+                    <a:pt x="286490" y="708284"/>
+                  </a:lnTo>
+                  <a:lnTo>
+                    <a:pt x="214867" y="713300"/>
+                  </a:lnTo>
+                  <a:lnTo>
+                    <a:pt x="143245" y="718059"/>
+                  </a:lnTo>
+                  <a:lnTo>
+                    <a:pt x="71622" y="722574"/>
+                  </a:lnTo>
+                  <a:lnTo>
+                    <a:pt x="0" y="726858"/>
                   </a:lnTo>
                 </a:path>
               </a:pathLst>
@@ -3986,312 +3974,312 @@
           </p:nvSpPr>
           <p:spPr>
             <a:xfrm>
-              <a:off x="1172049" y="4250450"/>
-              <a:ext cx="7090630" cy="830740"/>
+              <a:off x="1172049" y="4162928"/>
+              <a:ext cx="7090630" cy="953822"/>
             </a:xfrm>
             <a:custGeom>
               <a:avLst/>
               <a:pathLst>
-                <a:path w="7090630" h="830740">
+                <a:path w="7090630" h="953822">
                   <a:moveTo>
                     <a:pt x="0" y="0"/>
                   </a:moveTo>
                   <a:lnTo>
-                    <a:pt x="71622" y="13261"/>
-                  </a:lnTo>
-                  <a:lnTo>
-                    <a:pt x="143245" y="26388"/>
-                  </a:lnTo>
-                  <a:lnTo>
-                    <a:pt x="214867" y="39382"/>
-                  </a:lnTo>
-                  <a:lnTo>
-                    <a:pt x="286490" y="52244"/>
-                  </a:lnTo>
-                  <a:lnTo>
-                    <a:pt x="358112" y="64975"/>
-                  </a:lnTo>
-                  <a:lnTo>
-                    <a:pt x="429735" y="77577"/>
-                  </a:lnTo>
-                  <a:lnTo>
-                    <a:pt x="501357" y="90051"/>
-                  </a:lnTo>
-                  <a:lnTo>
-                    <a:pt x="572980" y="102399"/>
-                  </a:lnTo>
-                  <a:lnTo>
-                    <a:pt x="644602" y="114622"/>
-                  </a:lnTo>
-                  <a:lnTo>
-                    <a:pt x="716225" y="126720"/>
-                  </a:lnTo>
-                  <a:lnTo>
-                    <a:pt x="787847" y="138695"/>
-                  </a:lnTo>
-                  <a:lnTo>
-                    <a:pt x="859470" y="150549"/>
-                  </a:lnTo>
-                  <a:lnTo>
-                    <a:pt x="931092" y="162283"/>
-                  </a:lnTo>
-                  <a:lnTo>
-                    <a:pt x="1002715" y="173898"/>
-                  </a:lnTo>
-                  <a:lnTo>
-                    <a:pt x="1074337" y="185395"/>
-                  </a:lnTo>
-                  <a:lnTo>
-                    <a:pt x="1145960" y="196775"/>
-                  </a:lnTo>
-                  <a:lnTo>
-                    <a:pt x="1217582" y="208040"/>
-                  </a:lnTo>
-                  <a:lnTo>
-                    <a:pt x="1289205" y="219190"/>
-                  </a:lnTo>
-                  <a:lnTo>
-                    <a:pt x="1360827" y="230227"/>
-                  </a:lnTo>
-                  <a:lnTo>
-                    <a:pt x="1432450" y="241152"/>
-                  </a:lnTo>
-                  <a:lnTo>
-                    <a:pt x="1504073" y="251966"/>
-                  </a:lnTo>
-                  <a:lnTo>
-                    <a:pt x="1575695" y="262671"/>
-                  </a:lnTo>
-                  <a:lnTo>
-                    <a:pt x="1647318" y="273267"/>
-                  </a:lnTo>
-                  <a:lnTo>
-                    <a:pt x="1718940" y="283755"/>
-                  </a:lnTo>
-                  <a:lnTo>
-                    <a:pt x="1790563" y="294137"/>
-                  </a:lnTo>
-                  <a:lnTo>
-                    <a:pt x="1862185" y="304414"/>
-                  </a:lnTo>
-                  <a:lnTo>
-                    <a:pt x="1933808" y="314586"/>
-                  </a:lnTo>
-                  <a:lnTo>
-                    <a:pt x="2005430" y="324655"/>
-                  </a:lnTo>
-                  <a:lnTo>
-                    <a:pt x="2077053" y="334622"/>
-                  </a:lnTo>
-                  <a:lnTo>
-                    <a:pt x="2148675" y="344488"/>
-                  </a:lnTo>
-                  <a:lnTo>
-                    <a:pt x="2220298" y="354254"/>
-                  </a:lnTo>
-                  <a:lnTo>
-                    <a:pt x="2291920" y="363920"/>
-                  </a:lnTo>
-                  <a:lnTo>
-                    <a:pt x="2363543" y="373489"/>
-                  </a:lnTo>
-                  <a:lnTo>
-                    <a:pt x="2435165" y="382960"/>
-                  </a:lnTo>
-                  <a:lnTo>
-                    <a:pt x="2506788" y="392335"/>
-                  </a:lnTo>
-                  <a:lnTo>
-                    <a:pt x="2578410" y="401615"/>
-                  </a:lnTo>
-                  <a:lnTo>
-                    <a:pt x="2650033" y="410801"/>
-                  </a:lnTo>
-                  <a:lnTo>
-                    <a:pt x="2721655" y="419894"/>
-                  </a:lnTo>
-                  <a:lnTo>
-                    <a:pt x="2793278" y="428894"/>
-                  </a:lnTo>
-                  <a:lnTo>
-                    <a:pt x="2864901" y="437803"/>
-                  </a:lnTo>
-                  <a:lnTo>
-                    <a:pt x="2936523" y="446622"/>
-                  </a:lnTo>
-                  <a:lnTo>
-                    <a:pt x="3008146" y="455351"/>
-                  </a:lnTo>
-                  <a:lnTo>
-                    <a:pt x="3079768" y="463992"/>
-                  </a:lnTo>
-                  <a:lnTo>
-                    <a:pt x="3151391" y="472545"/>
-                  </a:lnTo>
-                  <a:lnTo>
-                    <a:pt x="3223013" y="481011"/>
-                  </a:lnTo>
-                  <a:lnTo>
-                    <a:pt x="3294636" y="489391"/>
-                  </a:lnTo>
-                  <a:lnTo>
-                    <a:pt x="3366258" y="497686"/>
-                  </a:lnTo>
-                  <a:lnTo>
-                    <a:pt x="3437881" y="505897"/>
-                  </a:lnTo>
-                  <a:lnTo>
-                    <a:pt x="3509503" y="514025"/>
-                  </a:lnTo>
-                  <a:lnTo>
-                    <a:pt x="3581126" y="522070"/>
-                  </a:lnTo>
-                  <a:lnTo>
-                    <a:pt x="3652748" y="530033"/>
-                  </a:lnTo>
-                  <a:lnTo>
-                    <a:pt x="3724371" y="537916"/>
-                  </a:lnTo>
-                  <a:lnTo>
-                    <a:pt x="3795993" y="545719"/>
-                  </a:lnTo>
-                  <a:lnTo>
-                    <a:pt x="3867616" y="553442"/>
-                  </a:lnTo>
-                  <a:lnTo>
-                    <a:pt x="3939238" y="561087"/>
-                  </a:lnTo>
-                  <a:lnTo>
-                    <a:pt x="4010861" y="568655"/>
-                  </a:lnTo>
-                  <a:lnTo>
-                    <a:pt x="4082483" y="576146"/>
-                  </a:lnTo>
-                  <a:lnTo>
-                    <a:pt x="4154106" y="583561"/>
-                  </a:lnTo>
-                  <a:lnTo>
-                    <a:pt x="4225729" y="590900"/>
-                  </a:lnTo>
-                  <a:lnTo>
-                    <a:pt x="4297351" y="598165"/>
-                  </a:lnTo>
-                  <a:lnTo>
-                    <a:pt x="4368974" y="605356"/>
-                  </a:lnTo>
-                  <a:lnTo>
-                    <a:pt x="4440596" y="612475"/>
-                  </a:lnTo>
-                  <a:lnTo>
-                    <a:pt x="4512219" y="619521"/>
-                  </a:lnTo>
-                  <a:lnTo>
-                    <a:pt x="4583841" y="626495"/>
-                  </a:lnTo>
-                  <a:lnTo>
-                    <a:pt x="4655464" y="633399"/>
-                  </a:lnTo>
-                  <a:lnTo>
-                    <a:pt x="4727086" y="640233"/>
-                  </a:lnTo>
-                  <a:lnTo>
-                    <a:pt x="4798709" y="646997"/>
-                  </a:lnTo>
-                  <a:lnTo>
-                    <a:pt x="4870331" y="653693"/>
-                  </a:lnTo>
-                  <a:lnTo>
-                    <a:pt x="4941954" y="660321"/>
-                  </a:lnTo>
-                  <a:lnTo>
-                    <a:pt x="5013576" y="666881"/>
-                  </a:lnTo>
-                  <a:lnTo>
-                    <a:pt x="5085199" y="673375"/>
-                  </a:lnTo>
-                  <a:lnTo>
-                    <a:pt x="5156821" y="679803"/>
-                  </a:lnTo>
-                  <a:lnTo>
-                    <a:pt x="5228444" y="686166"/>
-                  </a:lnTo>
-                  <a:lnTo>
-                    <a:pt x="5300066" y="692464"/>
-                  </a:lnTo>
-                  <a:lnTo>
-                    <a:pt x="5371689" y="698699"/>
-                  </a:lnTo>
-                  <a:lnTo>
-                    <a:pt x="5443311" y="704870"/>
-                  </a:lnTo>
-                  <a:lnTo>
-                    <a:pt x="5514934" y="710978"/>
-                  </a:lnTo>
-                  <a:lnTo>
-                    <a:pt x="5586557" y="717025"/>
-                  </a:lnTo>
-                  <a:lnTo>
-                    <a:pt x="5658179" y="723010"/>
-                  </a:lnTo>
-                  <a:lnTo>
-                    <a:pt x="5729802" y="728934"/>
-                  </a:lnTo>
-                  <a:lnTo>
-                    <a:pt x="5801424" y="734798"/>
-                  </a:lnTo>
-                  <a:lnTo>
-                    <a:pt x="5873047" y="740603"/>
-                  </a:lnTo>
-                  <a:lnTo>
-                    <a:pt x="5944669" y="746349"/>
-                  </a:lnTo>
-                  <a:lnTo>
-                    <a:pt x="6016292" y="752036"/>
-                  </a:lnTo>
-                  <a:lnTo>
-                    <a:pt x="6087914" y="757666"/>
-                  </a:lnTo>
-                  <a:lnTo>
-                    <a:pt x="6159537" y="763239"/>
-                  </a:lnTo>
-                  <a:lnTo>
-                    <a:pt x="6231159" y="768755"/>
-                  </a:lnTo>
-                  <a:lnTo>
-                    <a:pt x="6302782" y="774215"/>
-                  </a:lnTo>
-                  <a:lnTo>
-                    <a:pt x="6374404" y="779620"/>
-                  </a:lnTo>
-                  <a:lnTo>
-                    <a:pt x="6446027" y="784970"/>
-                  </a:lnTo>
-                  <a:lnTo>
-                    <a:pt x="6517649" y="790265"/>
-                  </a:lnTo>
-                  <a:lnTo>
-                    <a:pt x="6589272" y="795507"/>
-                  </a:lnTo>
-                  <a:lnTo>
-                    <a:pt x="6660894" y="800696"/>
-                  </a:lnTo>
-                  <a:lnTo>
-                    <a:pt x="6732517" y="805832"/>
-                  </a:lnTo>
-                  <a:lnTo>
-                    <a:pt x="6804139" y="810916"/>
-                  </a:lnTo>
-                  <a:lnTo>
-                    <a:pt x="6875762" y="815948"/>
-                  </a:lnTo>
-                  <a:lnTo>
-                    <a:pt x="6947385" y="820929"/>
-                  </a:lnTo>
-                  <a:lnTo>
-                    <a:pt x="7019007" y="825860"/>
-                  </a:lnTo>
-                  <a:lnTo>
-                    <a:pt x="7090630" y="830740"/>
+                    <a:pt x="71622" y="16134"/>
+                  </a:lnTo>
+                  <a:lnTo>
+                    <a:pt x="143245" y="32081"/>
+                  </a:lnTo>
+                  <a:lnTo>
+                    <a:pt x="214867" y="47845"/>
+                  </a:lnTo>
+                  <a:lnTo>
+                    <a:pt x="286490" y="63425"/>
+                  </a:lnTo>
+                  <a:lnTo>
+                    <a:pt x="358112" y="78826"/>
+                  </a:lnTo>
+                  <a:lnTo>
+                    <a:pt x="429735" y="94048"/>
+                  </a:lnTo>
+                  <a:lnTo>
+                    <a:pt x="501357" y="109094"/>
+                  </a:lnTo>
+                  <a:lnTo>
+                    <a:pt x="572980" y="123966"/>
+                  </a:lnTo>
+                  <a:lnTo>
+                    <a:pt x="644602" y="138666"/>
+                  </a:lnTo>
+                  <a:lnTo>
+                    <a:pt x="716225" y="153196"/>
+                  </a:lnTo>
+                  <a:lnTo>
+                    <a:pt x="787847" y="167557"/>
+                  </a:lnTo>
+                  <a:lnTo>
+                    <a:pt x="859470" y="181753"/>
+                  </a:lnTo>
+                  <a:lnTo>
+                    <a:pt x="931092" y="195784"/>
+                  </a:lnTo>
+                  <a:lnTo>
+                    <a:pt x="1002715" y="209653"/>
+                  </a:lnTo>
+                  <a:lnTo>
+                    <a:pt x="1074337" y="223361"/>
+                  </a:lnTo>
+                  <a:lnTo>
+                    <a:pt x="1145960" y="236911"/>
+                  </a:lnTo>
+                  <a:lnTo>
+                    <a:pt x="1217582" y="250304"/>
+                  </a:lnTo>
+                  <a:lnTo>
+                    <a:pt x="1289205" y="263542"/>
+                  </a:lnTo>
+                  <a:lnTo>
+                    <a:pt x="1360827" y="276626"/>
+                  </a:lnTo>
+                  <a:lnTo>
+                    <a:pt x="1432450" y="289560"/>
+                  </a:lnTo>
+                  <a:lnTo>
+                    <a:pt x="1504073" y="302344"/>
+                  </a:lnTo>
+                  <a:lnTo>
+                    <a:pt x="1575695" y="314979"/>
+                  </a:lnTo>
+                  <a:lnTo>
+                    <a:pt x="1647318" y="327469"/>
+                  </a:lnTo>
+                  <a:lnTo>
+                    <a:pt x="1718940" y="339814"/>
+                  </a:lnTo>
+                  <a:lnTo>
+                    <a:pt x="1790563" y="352016"/>
+                  </a:lnTo>
+                  <a:lnTo>
+                    <a:pt x="1862185" y="364077"/>
+                  </a:lnTo>
+                  <a:lnTo>
+                    <a:pt x="1933808" y="375999"/>
+                  </a:lnTo>
+                  <a:lnTo>
+                    <a:pt x="2005430" y="387782"/>
+                  </a:lnTo>
+                  <a:lnTo>
+                    <a:pt x="2077053" y="399429"/>
+                  </a:lnTo>
+                  <a:lnTo>
+                    <a:pt x="2148675" y="410942"/>
+                  </a:lnTo>
+                  <a:lnTo>
+                    <a:pt x="2220298" y="422321"/>
+                  </a:lnTo>
+                  <a:lnTo>
+                    <a:pt x="2291920" y="433568"/>
+                  </a:lnTo>
+                  <a:lnTo>
+                    <a:pt x="2363543" y="444685"/>
+                  </a:lnTo>
+                  <a:lnTo>
+                    <a:pt x="2435165" y="455674"/>
+                  </a:lnTo>
+                  <a:lnTo>
+                    <a:pt x="2506788" y="466536"/>
+                  </a:lnTo>
+                  <a:lnTo>
+                    <a:pt x="2578410" y="477272"/>
+                  </a:lnTo>
+                  <a:lnTo>
+                    <a:pt x="2650033" y="487883"/>
+                  </a:lnTo>
+                  <a:lnTo>
+                    <a:pt x="2721655" y="498372"/>
+                  </a:lnTo>
+                  <a:lnTo>
+                    <a:pt x="2793278" y="508739"/>
+                  </a:lnTo>
+                  <a:lnTo>
+                    <a:pt x="2864901" y="518987"/>
+                  </a:lnTo>
+                  <a:lnTo>
+                    <a:pt x="2936523" y="529116"/>
+                  </a:lnTo>
+                  <a:lnTo>
+                    <a:pt x="3008146" y="539127"/>
+                  </a:lnTo>
+                  <a:lnTo>
+                    <a:pt x="3079768" y="549023"/>
+                  </a:lnTo>
+                  <a:lnTo>
+                    <a:pt x="3151391" y="558805"/>
+                  </a:lnTo>
+                  <a:lnTo>
+                    <a:pt x="3223013" y="568473"/>
+                  </a:lnTo>
+                  <a:lnTo>
+                    <a:pt x="3294636" y="578029"/>
+                  </a:lnTo>
+                  <a:lnTo>
+                    <a:pt x="3366258" y="587475"/>
+                  </a:lnTo>
+                  <a:lnTo>
+                    <a:pt x="3437881" y="596811"/>
+                  </a:lnTo>
+                  <a:lnTo>
+                    <a:pt x="3509503" y="606040"/>
+                  </a:lnTo>
+                  <a:lnTo>
+                    <a:pt x="3581126" y="615161"/>
+                  </a:lnTo>
+                  <a:lnTo>
+                    <a:pt x="3652748" y="624177"/>
+                  </a:lnTo>
+                  <a:lnTo>
+                    <a:pt x="3724371" y="633089"/>
+                  </a:lnTo>
+                  <a:lnTo>
+                    <a:pt x="3795993" y="641897"/>
+                  </a:lnTo>
+                  <a:lnTo>
+                    <a:pt x="3867616" y="650604"/>
+                  </a:lnTo>
+                  <a:lnTo>
+                    <a:pt x="3939238" y="659210"/>
+                  </a:lnTo>
+                  <a:lnTo>
+                    <a:pt x="4010861" y="667716"/>
+                  </a:lnTo>
+                  <a:lnTo>
+                    <a:pt x="4082483" y="676124"/>
+                  </a:lnTo>
+                  <a:lnTo>
+                    <a:pt x="4154106" y="684435"/>
+                  </a:lnTo>
+                  <a:lnTo>
+                    <a:pt x="4225729" y="692649"/>
+                  </a:lnTo>
+                  <a:lnTo>
+                    <a:pt x="4297351" y="700769"/>
+                  </a:lnTo>
+                  <a:lnTo>
+                    <a:pt x="4368974" y="708794"/>
+                  </a:lnTo>
+                  <a:lnTo>
+                    <a:pt x="4440596" y="716727"/>
+                  </a:lnTo>
+                  <a:lnTo>
+                    <a:pt x="4512219" y="724567"/>
+                  </a:lnTo>
+                  <a:lnTo>
+                    <a:pt x="4583841" y="732317"/>
+                  </a:lnTo>
+                  <a:lnTo>
+                    <a:pt x="4655464" y="739978"/>
+                  </a:lnTo>
+                  <a:lnTo>
+                    <a:pt x="4727086" y="747549"/>
+                  </a:lnTo>
+                  <a:lnTo>
+                    <a:pt x="4798709" y="755034"/>
+                  </a:lnTo>
+                  <a:lnTo>
+                    <a:pt x="4870331" y="762431"/>
+                  </a:lnTo>
+                  <a:lnTo>
+                    <a:pt x="4941954" y="769743"/>
+                  </a:lnTo>
+                  <a:lnTo>
+                    <a:pt x="5013576" y="776970"/>
+                  </a:lnTo>
+                  <a:lnTo>
+                    <a:pt x="5085199" y="784114"/>
+                  </a:lnTo>
+                  <a:lnTo>
+                    <a:pt x="5156821" y="791175"/>
+                  </a:lnTo>
+                  <a:lnTo>
+                    <a:pt x="5228444" y="798154"/>
+                  </a:lnTo>
+                  <a:lnTo>
+                    <a:pt x="5300066" y="805053"/>
+                  </a:lnTo>
+                  <a:lnTo>
+                    <a:pt x="5371689" y="811871"/>
+                  </a:lnTo>
+                  <a:lnTo>
+                    <a:pt x="5443311" y="818611"/>
+                  </a:lnTo>
+                  <a:lnTo>
+                    <a:pt x="5514934" y="825273"/>
+                  </a:lnTo>
+                  <a:lnTo>
+                    <a:pt x="5586557" y="831858"/>
+                  </a:lnTo>
+                  <a:lnTo>
+                    <a:pt x="5658179" y="838366"/>
+                  </a:lnTo>
+                  <a:lnTo>
+                    <a:pt x="5729802" y="844799"/>
+                  </a:lnTo>
+                  <a:lnTo>
+                    <a:pt x="5801424" y="851158"/>
+                  </a:lnTo>
+                  <a:lnTo>
+                    <a:pt x="5873047" y="857443"/>
+                  </a:lnTo>
+                  <a:lnTo>
+                    <a:pt x="5944669" y="863656"/>
+                  </a:lnTo>
+                  <a:lnTo>
+                    <a:pt x="6016292" y="869796"/>
+                  </a:lnTo>
+                  <a:lnTo>
+                    <a:pt x="6087914" y="875866"/>
+                  </a:lnTo>
+                  <a:lnTo>
+                    <a:pt x="6159537" y="881865"/>
+                  </a:lnTo>
+                  <a:lnTo>
+                    <a:pt x="6231159" y="887795"/>
+                  </a:lnTo>
+                  <a:lnTo>
+                    <a:pt x="6302782" y="893656"/>
+                  </a:lnTo>
+                  <a:lnTo>
+                    <a:pt x="6374404" y="899450"/>
+                  </a:lnTo>
+                  <a:lnTo>
+                    <a:pt x="6446027" y="905176"/>
+                  </a:lnTo>
+                  <a:lnTo>
+                    <a:pt x="6517649" y="910836"/>
+                  </a:lnTo>
+                  <a:lnTo>
+                    <a:pt x="6589272" y="916431"/>
+                  </a:lnTo>
+                  <a:lnTo>
+                    <a:pt x="6660894" y="921961"/>
+                  </a:lnTo>
+                  <a:lnTo>
+                    <a:pt x="6732517" y="927427"/>
+                  </a:lnTo>
+                  <a:lnTo>
+                    <a:pt x="6804139" y="932829"/>
+                  </a:lnTo>
+                  <a:lnTo>
+                    <a:pt x="6875762" y="938170"/>
+                  </a:lnTo>
+                  <a:lnTo>
+                    <a:pt x="6947385" y="943448"/>
+                  </a:lnTo>
+                  <a:lnTo>
+                    <a:pt x="7019007" y="948665"/>
+                  </a:lnTo>
+                  <a:lnTo>
+                    <a:pt x="7090630" y="953822"/>
                   </a:lnTo>
                 </a:path>
               </a:pathLst>
@@ -4363,7 +4351,7 @@
           </p:nvSpPr>
           <p:spPr>
             <a:xfrm>
-              <a:off x="4363883" y="2073503"/>
+              <a:off x="4368185" y="2073503"/>
               <a:ext cx="0" cy="3649639"/>
             </a:xfrm>
             <a:custGeom>
@@ -4406,7 +4394,7 @@
           </p:nvSpPr>
           <p:spPr>
             <a:xfrm>
-              <a:off x="3178931" y="2073503"/>
+              <a:off x="3176242" y="2073503"/>
               <a:ext cx="0" cy="3649639"/>
             </a:xfrm>
             <a:custGeom>
@@ -4449,7 +4437,7 @@
           </p:nvSpPr>
           <p:spPr>
             <a:xfrm>
-              <a:off x="5373904" y="2073503"/>
+              <a:off x="5386913" y="2073503"/>
               <a:ext cx="0" cy="3649639"/>
             </a:xfrm>
             <a:custGeom>
@@ -4722,7 +4710,7 @@
           </p:nvSpPr>
           <p:spPr>
             <a:xfrm>
-              <a:off x="1536080" y="5785772"/>
+              <a:off x="1536741" y="5785772"/>
               <a:ext cx="161574" cy="80101"/>
             </a:xfrm>
             <a:prstGeom prst="rect">
@@ -4768,7 +4756,7 @@
           </p:nvSpPr>
           <p:spPr>
             <a:xfrm>
-              <a:off x="3342736" y="5785772"/>
+              <a:off x="3341771" y="5785772"/>
               <a:ext cx="161574" cy="80101"/>
             </a:xfrm>
             <a:prstGeom prst="rect">
@@ -4814,7 +4802,7 @@
           </p:nvSpPr>
           <p:spPr>
             <a:xfrm>
-              <a:off x="5199088" y="5785772"/>
+              <a:off x="5196500" y="5785772"/>
               <a:ext cx="62179" cy="80101"/>
             </a:xfrm>
             <a:prstGeom prst="rect">
@@ -4860,7 +4848,7 @@
           </p:nvSpPr>
           <p:spPr>
             <a:xfrm>
-              <a:off x="6974654" y="5785772"/>
+              <a:off x="6970441" y="5785772"/>
               <a:ext cx="124358" cy="80101"/>
             </a:xfrm>
             <a:prstGeom prst="rect">
@@ -4999,7 +4987,7 @@
           <p:spPr>
             <a:xfrm>
               <a:off x="817517" y="1896563"/>
-              <a:ext cx="6921825" cy="82021"/>
+              <a:ext cx="6985375" cy="82021"/>
             </a:xfrm>
             <a:prstGeom prst="rect">
               <a:avLst/>
@@ -5031,7 +5019,7 @@
                   <a:latin typeface="Helvetica"/>
                   <a:cs typeface="Helvetica"/>
                 </a:rPr>
-                <a:t>subHR per 10 % decline: 1.14 (0.52-2.49), p_Bonf = 1.000 (n = 6)  |  per IQR decline (Δ = 24.3 %): 1.37 (0.20-9.15)  |  IQR: [-22.7, 1.6] %</a:t>
+                <a:t>subHR per 10 % decline: 1.16 (0.52-2.60), p_Bonf = 1.000 (n = 6)  |  per IQR decline (Δ = 24.5 %): 1.43 (0.20-10.40)  |  IQR: [-22.7, 1.8] %</a:t>
               </a:r>
             </a:p>
           </p:txBody>
